--- a/static/ppts/G7_Sci_Full_Revision.pptx
+++ b/static/ppts/G7_Sci_Full_Revision.pptx
@@ -1603,38 +1603,55 @@
                 <a:ea typeface="Georgia" pitchFamily="34" charset="-122"/>
                 <a:cs typeface="Georgia" pitchFamily="34" charset="-120"/>
               </a:rPr>
-              <a:t>Forces &amp; Motion Revision</a:t>
+              <a:t>Forces &amp; Motion</a:t>
             </a:r>
             <a:endParaRPr lang="en-US" sz="4000" dirty="0"/>
           </a:p>
-        </p:txBody>
-      </p:sp>
-      <p:sp>
-        <p:nvSpPr>
-          <p:cNvPr id="6" name="Text 4"/>
-          <p:cNvSpPr/>
-          <p:nvPr/>
-        </p:nvSpPr>
-        <p:spPr>
-          <a:xfrm>
-            <a:off x="731520" y="3200400"/>
-            <a:ext cx="7680960" cy="548640"/>
-          </a:xfrm>
-          <a:prstGeom prst="rect">
-            <a:avLst/>
-          </a:prstGeom>
-          <a:noFill/>
-          <a:ln/>
-        </p:spPr>
-        <p:txBody>
-          <a:bodyPr wrap="square" rtlCol="0" anchor="ctr"/>
-          <a:lstStyle/>
           <a:p>
             <a:pPr indent="0" marL="0">
               <a:buNone/>
             </a:pPr>
             <a:r>
-              <a:rPr lang="en-US" sz="1600" dirty="0">
+              <a:rPr lang="en-US" sz="4000" b="1" dirty="0">
+                <a:solidFill>
+                  <a:srgbClr val="FFFFFF"/>
+                </a:solidFill>
+                <a:latin typeface="Georgia" pitchFamily="34" charset="0"/>
+                <a:ea typeface="Georgia" pitchFamily="34" charset="-122"/>
+                <a:cs typeface="Georgia" pitchFamily="34" charset="-120"/>
+              </a:rPr>
+              <a:t>Full Revision</a:t>
+            </a:r>
+            <a:endParaRPr lang="en-US" sz="4000" dirty="0"/>
+          </a:p>
+        </p:txBody>
+      </p:sp>
+      <p:sp>
+        <p:nvSpPr>
+          <p:cNvPr id="6" name="Text 4"/>
+          <p:cNvSpPr/>
+          <p:nvPr/>
+        </p:nvSpPr>
+        <p:spPr>
+          <a:xfrm>
+            <a:off x="731520" y="3200400"/>
+            <a:ext cx="7680960" cy="548640"/>
+          </a:xfrm>
+          <a:prstGeom prst="rect">
+            <a:avLst/>
+          </a:prstGeom>
+          <a:noFill/>
+          <a:ln/>
+        </p:spPr>
+        <p:txBody>
+          <a:bodyPr wrap="square" rtlCol="0" anchor="ctr"/>
+          <a:lstStyle/>
+          <a:p>
+            <a:pPr indent="0" marL="0">
+              <a:buNone/>
+            </a:pPr>
+            <a:r>
+              <a:rPr lang="en-US" sz="1600" i="1" dirty="0">
                 <a:solidFill>
                   <a:srgbClr val="9B9690"/>
                 </a:solidFill>
@@ -1673,7 +1690,7 @@
               <a:buNone/>
             </a:pPr>
             <a:r>
-              <a:rPr lang="en-US" sz="1100" dirty="0">
+              <a:rPr lang="en-US" sz="1200" dirty="0">
                 <a:solidFill>
                   <a:srgbClr val="6B6660"/>
                 </a:solidFill>
@@ -1681,9 +1698,9 @@
                 <a:ea typeface="Calibri" pitchFamily="34" charset="-122"/>
                 <a:cs typeface="Calibri" pitchFamily="34" charset="-120"/>
               </a:rPr>
-              <a:t>Mr Zocchi · NIS</a:t>
+              <a:t>Mr Zocchi</a:t>
             </a:r>
-            <a:endParaRPr lang="en-US" sz="1100" dirty="0"/>
+            <a:endParaRPr lang="en-US" sz="1200" dirty="0"/>
           </a:p>
         </p:txBody>
       </p:sp>
@@ -1741,7 +1758,7 @@
         <p:spPr>
           <a:xfrm>
             <a:off x="731520" y="914400"/>
-            <a:ext cx="2743200" cy="1371600"/>
+            <a:ext cx="1828800" cy="1097280"/>
           </a:xfrm>
           <a:prstGeom prst="rect">
             <a:avLst/>
@@ -1781,7 +1798,7 @@
         </p:nvSpPr>
         <p:spPr>
           <a:xfrm>
-            <a:off x="731520" y="2286000"/>
+            <a:off x="731520" y="2011680"/>
             <a:ext cx="7680960" cy="1097280"/>
           </a:xfrm>
           <a:prstGeom prst="rect">
@@ -1798,7 +1815,7 @@
               <a:buNone/>
             </a:pPr>
             <a:r>
-              <a:rPr lang="en-US" sz="3600" b="1" dirty="0">
+              <a:rPr lang="en-US" sz="3200" b="1" dirty="0">
                 <a:solidFill>
                   <a:srgbClr val="FFFFFF"/>
                 </a:solidFill>
@@ -1808,9 +1825,29 @@
               </a:rPr>
               <a:t>Types of Forces</a:t>
             </a:r>
-            <a:endParaRPr lang="en-US" sz="3600" dirty="0"/>
-          </a:p>
-        </p:txBody>
+            <a:endParaRPr lang="en-US" sz="3200" dirty="0"/>
+          </a:p>
+        </p:txBody>
+      </p:sp>
+      <p:sp>
+        <p:nvSpPr>
+          <p:cNvPr id="5" name="Shape 3"/>
+          <p:cNvSpPr/>
+          <p:nvPr/>
+        </p:nvSpPr>
+        <p:spPr>
+          <a:xfrm>
+            <a:off x="731520" y="3200400"/>
+            <a:ext cx="1828800" cy="54864"/>
+          </a:xfrm>
+          <a:prstGeom prst="rect">
+            <a:avLst/>
+          </a:prstGeom>
+          <a:solidFill>
+            <a:srgbClr val="C8372D"/>
+          </a:solidFill>
+          <a:ln/>
+        </p:spPr>
       </p:sp>
     </p:spTree>
   </p:cSld>
@@ -1823,6 +1860,13 @@
 <file path=ppt/slides/slide3.xml><?xml version="1.0" encoding="utf-8"?>
 <p:sld xmlns:a="http://schemas.openxmlformats.org/drawingml/2006/main" xmlns:r="http://schemas.openxmlformats.org/officeDocument/2006/relationships" xmlns:p="http://schemas.openxmlformats.org/presentationml/2006/main">
   <p:cSld name="Slide 3">
+    <p:bg>
+      <p:bgPr>
+        <a:solidFill>
+          <a:srgbClr val="FAF8F5"/>
+        </a:solidFill>
+      </p:bgPr>
+    </p:bg>
     <p:spTree>
       <p:nvGrpSpPr>
         <p:cNvPr id="1" name=""/>
@@ -1846,13 +1890,13 @@
         <p:spPr>
           <a:xfrm>
             <a:off x="0" y="0"/>
-            <a:ext cx="9144000" cy="5143500"/>
-          </a:xfrm>
-          <a:prstGeom prst="rect">
-            <a:avLst/>
-          </a:prstGeom>
-          <a:solidFill>
-            <a:srgbClr val="FAF8F5"/>
+            <a:ext cx="9144000" cy="822960"/>
+          </a:xfrm>
+          <a:prstGeom prst="rect">
+            <a:avLst/>
+          </a:prstGeom>
+          <a:solidFill>
+            <a:srgbClr val="FFFFFF"/>
           </a:solidFill>
           <a:ln/>
         </p:spPr>
@@ -1865,8 +1909,8 @@
         </p:nvSpPr>
         <p:spPr>
           <a:xfrm>
-            <a:off x="0" y="0"/>
-            <a:ext cx="9144000" cy="54864"/>
+            <a:off x="0" y="795528"/>
+            <a:ext cx="9144000" cy="27432"/>
           </a:xfrm>
           <a:prstGeom prst="rect">
             <a:avLst/>
@@ -1885,7 +1929,7 @@
         </p:nvSpPr>
         <p:spPr>
           <a:xfrm>
-            <a:off x="640080" y="320040"/>
+            <a:off x="640080" y="91440"/>
             <a:ext cx="7863840" cy="640080"/>
           </a:xfrm>
           <a:prstGeom prst="rect">
@@ -1902,7 +1946,7 @@
               <a:buNone/>
             </a:pPr>
             <a:r>
-              <a:rPr lang="en-US" sz="2600" b="1" dirty="0">
+              <a:rPr lang="en-US" sz="2200" b="1" dirty="0">
                 <a:solidFill>
                   <a:srgbClr val="1B2A4A"/>
                 </a:solidFill>
@@ -1910,9 +1954,9 @@
                 <a:ea typeface="Georgia" pitchFamily="34" charset="-122"/>
                 <a:cs typeface="Georgia" pitchFamily="34" charset="-120"/>
               </a:rPr>
-              <a:t>Forces Quick Reference</a:t>
+              <a:t>Forces Recap</a:t>
             </a:r>
-            <a:endParaRPr lang="en-US" sz="2600" dirty="0"/>
+            <a:endParaRPr lang="en-US" sz="2200" dirty="0"/>
           </a:p>
         </p:txBody>
       </p:sp>
@@ -1924,8 +1968,8 @@
         </p:nvSpPr>
         <p:spPr>
           <a:xfrm>
-            <a:off x="640080" y="1188720"/>
-            <a:ext cx="7863840" cy="3200400"/>
+            <a:off x="640080" y="1005840"/>
+            <a:ext cx="7863840" cy="2926080"/>
           </a:xfrm>
           <a:prstGeom prst="rect">
             <a:avLst/>
@@ -1934,18 +1978,18 @@
           <a:ln/>
         </p:spPr>
         <p:txBody>
-          <a:bodyPr wrap="square" rtlCol="0" anchor="t"/>
+          <a:bodyPr wrap="square" rtlCol="0" anchor="ctr"/>
           <a:lstStyle/>
           <a:p>
             <a:pPr marL="342900" indent="-342900">
-              <a:lnSpc>
-                <a:spcPct val="140000"/>
-              </a:lnSpc>
+              <a:spcAft>
+                <a:spcPts val="800"/>
+              </a:spcAft>
               <a:buSzPct val="100000"/>
               <a:buChar char="•"/>
             </a:pPr>
             <a:r>
-              <a:rPr lang="en-US" sz="1500" dirty="0">
+              <a:rPr lang="en-US" sz="1600" dirty="0">
                 <a:solidFill>
                   <a:srgbClr val="3D3A36"/>
                 </a:solidFill>
@@ -1955,18 +1999,18 @@
               </a:rPr>
               <a:t>Force = push or pull, measured in Newtons (N).</a:t>
             </a:r>
-            <a:endParaRPr lang="en-US" sz="1500" dirty="0"/>
+            <a:endParaRPr lang="en-US" sz="1600" dirty="0"/>
           </a:p>
           <a:p>
             <a:pPr marL="342900" indent="-342900">
-              <a:lnSpc>
-                <a:spcPct val="140000"/>
-              </a:lnSpc>
+              <a:spcAft>
+                <a:spcPts val="800"/>
+              </a:spcAft>
               <a:buSzPct val="100000"/>
               <a:buChar char="•"/>
             </a:pPr>
             <a:r>
-              <a:rPr lang="en-US" sz="1500" dirty="0">
+              <a:rPr lang="en-US" sz="1600" dirty="0">
                 <a:solidFill>
                   <a:srgbClr val="3D3A36"/>
                 </a:solidFill>
@@ -1974,20 +2018,20 @@
                 <a:ea typeface="Calibri" pitchFamily="34" charset="-122"/>
                 <a:cs typeface="Calibri" pitchFamily="34" charset="-120"/>
               </a:rPr>
-              <a:t>Contact forces: friction, air resistance, tension.</a:t>
+              <a:t>Contact: friction, air resistance, tension, normal.</a:t>
             </a:r>
-            <a:endParaRPr lang="en-US" sz="1500" dirty="0"/>
+            <a:endParaRPr lang="en-US" sz="1600" dirty="0"/>
           </a:p>
           <a:p>
             <a:pPr marL="342900" indent="-342900">
-              <a:lnSpc>
-                <a:spcPct val="140000"/>
-              </a:lnSpc>
+              <a:spcAft>
+                <a:spcPts val="800"/>
+              </a:spcAft>
               <a:buSzPct val="100000"/>
               <a:buChar char="•"/>
             </a:pPr>
             <a:r>
-              <a:rPr lang="en-US" sz="1500" dirty="0">
+              <a:rPr lang="en-US" sz="1600" dirty="0">
                 <a:solidFill>
                   <a:srgbClr val="3D3A36"/>
                 </a:solidFill>
@@ -1995,20 +2039,20 @@
                 <a:ea typeface="Calibri" pitchFamily="34" charset="-122"/>
                 <a:cs typeface="Calibri" pitchFamily="34" charset="-120"/>
               </a:rPr>
-              <a:t>Non-contact forces: gravity, magnetism.</a:t>
+              <a:t>Non-contact: gravity, magnetic (maglev 磁悬浮), electrostatic.</a:t>
             </a:r>
-            <a:endParaRPr lang="en-US" sz="1500" dirty="0"/>
+            <a:endParaRPr lang="en-US" sz="1600" dirty="0"/>
           </a:p>
           <a:p>
             <a:pPr marL="342900" indent="-342900">
-              <a:lnSpc>
-                <a:spcPct val="140000"/>
-              </a:lnSpc>
+              <a:spcAft>
+                <a:spcPts val="800"/>
+              </a:spcAft>
               <a:buSzPct val="100000"/>
               <a:buChar char="•"/>
             </a:pPr>
             <a:r>
-              <a:rPr lang="en-US" sz="1500" dirty="0">
+              <a:rPr lang="en-US" sz="1600" dirty="0">
                 <a:solidFill>
                   <a:srgbClr val="3D3A36"/>
                 </a:solidFill>
@@ -2016,9 +2060,9 @@
                 <a:ea typeface="Calibri" pitchFamily="34" charset="-122"/>
                 <a:cs typeface="Calibri" pitchFamily="34" charset="-120"/>
               </a:rPr>
-              <a:t>Weight = mass × 10 (on Earth).</a:t>
+              <a:t>Force diagrams: arrows show size and direction.</a:t>
             </a:r>
-            <a:endParaRPr lang="en-US" sz="1500" dirty="0"/>
+            <a:endParaRPr lang="en-US" sz="1600" dirty="0"/>
           </a:p>
         </p:txBody>
       </p:sp>
@@ -2076,7 +2120,7 @@
         <p:spPr>
           <a:xfrm>
             <a:off x="731520" y="914400"/>
-            <a:ext cx="2743200" cy="1371600"/>
+            <a:ext cx="1828800" cy="1097280"/>
           </a:xfrm>
           <a:prstGeom prst="rect">
             <a:avLst/>
@@ -2116,7 +2160,7 @@
         </p:nvSpPr>
         <p:spPr>
           <a:xfrm>
-            <a:off x="731520" y="2286000"/>
+            <a:off x="731520" y="2011680"/>
             <a:ext cx="7680960" cy="1097280"/>
           </a:xfrm>
           <a:prstGeom prst="rect">
@@ -2133,7 +2177,7 @@
               <a:buNone/>
             </a:pPr>
             <a:r>
-              <a:rPr lang="en-US" sz="3600" b="1" dirty="0">
+              <a:rPr lang="en-US" sz="3200" b="1" dirty="0">
                 <a:solidFill>
                   <a:srgbClr val="FFFFFF"/>
                 </a:solidFill>
@@ -2143,9 +2187,29 @@
               </a:rPr>
               <a:t>Balanced &amp; Unbalanced</a:t>
             </a:r>
-            <a:endParaRPr lang="en-US" sz="3600" dirty="0"/>
-          </a:p>
-        </p:txBody>
+            <a:endParaRPr lang="en-US" sz="3200" dirty="0"/>
+          </a:p>
+        </p:txBody>
+      </p:sp>
+      <p:sp>
+        <p:nvSpPr>
+          <p:cNvPr id="5" name="Shape 3"/>
+          <p:cNvSpPr/>
+          <p:nvPr/>
+        </p:nvSpPr>
+        <p:spPr>
+          <a:xfrm>
+            <a:off x="731520" y="3200400"/>
+            <a:ext cx="1828800" cy="54864"/>
+          </a:xfrm>
+          <a:prstGeom prst="rect">
+            <a:avLst/>
+          </a:prstGeom>
+          <a:solidFill>
+            <a:srgbClr val="C8372D"/>
+          </a:solidFill>
+          <a:ln/>
+        </p:spPr>
       </p:sp>
     </p:spTree>
   </p:cSld>
@@ -2158,6 +2222,13 @@
 <file path=ppt/slides/slide5.xml><?xml version="1.0" encoding="utf-8"?>
 <p:sld xmlns:a="http://schemas.openxmlformats.org/drawingml/2006/main" xmlns:r="http://schemas.openxmlformats.org/officeDocument/2006/relationships" xmlns:p="http://schemas.openxmlformats.org/presentationml/2006/main">
   <p:cSld name="Slide 5">
+    <p:bg>
+      <p:bgPr>
+        <a:solidFill>
+          <a:srgbClr val="FAF8F5"/>
+        </a:solidFill>
+      </p:bgPr>
+    </p:bg>
     <p:spTree>
       <p:nvGrpSpPr>
         <p:cNvPr id="1" name=""/>
@@ -2181,13 +2252,13 @@
         <p:spPr>
           <a:xfrm>
             <a:off x="0" y="0"/>
-            <a:ext cx="9144000" cy="5143500"/>
-          </a:xfrm>
-          <a:prstGeom prst="rect">
-            <a:avLst/>
-          </a:prstGeom>
-          <a:solidFill>
-            <a:srgbClr val="FAF8F5"/>
+            <a:ext cx="9144000" cy="822960"/>
+          </a:xfrm>
+          <a:prstGeom prst="rect">
+            <a:avLst/>
+          </a:prstGeom>
+          <a:solidFill>
+            <a:srgbClr val="FFFFFF"/>
           </a:solidFill>
           <a:ln/>
         </p:spPr>
@@ -2200,8 +2271,8 @@
         </p:nvSpPr>
         <p:spPr>
           <a:xfrm>
-            <a:off x="0" y="0"/>
-            <a:ext cx="9144000" cy="54864"/>
+            <a:off x="0" y="795528"/>
+            <a:ext cx="9144000" cy="27432"/>
           </a:xfrm>
           <a:prstGeom prst="rect">
             <a:avLst/>
@@ -2220,7 +2291,7 @@
         </p:nvSpPr>
         <p:spPr>
           <a:xfrm>
-            <a:off x="640080" y="320040"/>
+            <a:off x="640080" y="91440"/>
             <a:ext cx="7863840" cy="640080"/>
           </a:xfrm>
           <a:prstGeom prst="rect">
@@ -2237,7 +2308,7 @@
               <a:buNone/>
             </a:pPr>
             <a:r>
-              <a:rPr lang="en-US" sz="2600" b="1" dirty="0">
+              <a:rPr lang="en-US" sz="2200" b="1" dirty="0">
                 <a:solidFill>
                   <a:srgbClr val="1B2A4A"/>
                 </a:solidFill>
@@ -2245,9 +2316,9 @@
                 <a:ea typeface="Georgia" pitchFamily="34" charset="-122"/>
                 <a:cs typeface="Georgia" pitchFamily="34" charset="-120"/>
               </a:rPr>
-              <a:t>Forces &amp; Motion</a:t>
+              <a:t>Net Force Recap</a:t>
             </a:r>
-            <a:endParaRPr lang="en-US" sz="2600" dirty="0"/>
+            <a:endParaRPr lang="en-US" sz="2200" dirty="0"/>
           </a:p>
         </p:txBody>
       </p:sp>
@@ -2259,8 +2330,8 @@
         </p:nvSpPr>
         <p:spPr>
           <a:xfrm>
-            <a:off x="640080" y="1188720"/>
-            <a:ext cx="7863840" cy="3200400"/>
+            <a:off x="640080" y="1005840"/>
+            <a:ext cx="7863840" cy="2926080"/>
           </a:xfrm>
           <a:prstGeom prst="rect">
             <a:avLst/>
@@ -2269,18 +2340,18 @@
           <a:ln/>
         </p:spPr>
         <p:txBody>
-          <a:bodyPr wrap="square" rtlCol="0" anchor="t"/>
+          <a:bodyPr wrap="square" rtlCol="0" anchor="ctr"/>
           <a:lstStyle/>
           <a:p>
             <a:pPr marL="342900" indent="-342900">
-              <a:lnSpc>
-                <a:spcPct val="140000"/>
-              </a:lnSpc>
+              <a:spcAft>
+                <a:spcPts val="800"/>
+              </a:spcAft>
               <a:buSzPct val="100000"/>
               <a:buChar char="•"/>
             </a:pPr>
             <a:r>
-              <a:rPr lang="en-US" sz="1500" dirty="0">
+              <a:rPr lang="en-US" sz="1600" dirty="0">
                 <a:solidFill>
                   <a:srgbClr val="3D3A36"/>
                 </a:solidFill>
@@ -2288,20 +2359,20 @@
                 <a:ea typeface="Calibri" pitchFamily="34" charset="-122"/>
                 <a:cs typeface="Calibri" pitchFamily="34" charset="-120"/>
               </a:rPr>
-              <a:t>Balanced (net = 0): no change in motion.</a:t>
+              <a:t>Balanced: equal &amp; opposite, net = 0, no change.</a:t>
             </a:r>
-            <a:endParaRPr lang="en-US" sz="1500" dirty="0"/>
+            <a:endParaRPr lang="en-US" sz="1600" dirty="0"/>
           </a:p>
           <a:p>
             <a:pPr marL="342900" indent="-342900">
-              <a:lnSpc>
-                <a:spcPct val="140000"/>
-              </a:lnSpc>
+              <a:spcAft>
+                <a:spcPts val="800"/>
+              </a:spcAft>
               <a:buSzPct val="100000"/>
               <a:buChar char="•"/>
             </a:pPr>
             <a:r>
-              <a:rPr lang="en-US" sz="1500" dirty="0">
+              <a:rPr lang="en-US" sz="1600" dirty="0">
                 <a:solidFill>
                   <a:srgbClr val="3D3A36"/>
                 </a:solidFill>
@@ -2309,20 +2380,20 @@
                 <a:ea typeface="Calibri" pitchFamily="34" charset="-122"/>
                 <a:cs typeface="Calibri" pitchFamily="34" charset="-120"/>
               </a:rPr>
-              <a:t>Unbalanced (net ≠ 0): acceleration.</a:t>
+              <a:t>Unbalanced: one larger, net ≠ 0, acceleration.</a:t>
             </a:r>
-            <a:endParaRPr lang="en-US" sz="1500" dirty="0"/>
+            <a:endParaRPr lang="en-US" sz="1600" dirty="0"/>
           </a:p>
           <a:p>
             <a:pPr marL="342900" indent="-342900">
-              <a:lnSpc>
-                <a:spcPct val="140000"/>
-              </a:lnSpc>
+              <a:spcAft>
+                <a:spcPts val="800"/>
+              </a:spcAft>
               <a:buSzPct val="100000"/>
               <a:buChar char="•"/>
             </a:pPr>
             <a:r>
-              <a:rPr lang="en-US" sz="1500" dirty="0">
+              <a:rPr lang="en-US" sz="1600" dirty="0">
                 <a:solidFill>
                   <a:srgbClr val="3D3A36"/>
                 </a:solidFill>
@@ -2330,9 +2401,9 @@
                 <a:ea typeface="Calibri" pitchFamily="34" charset="-122"/>
                 <a:cs typeface="Calibri" pitchFamily="34" charset="-120"/>
               </a:rPr>
-              <a:t>Resultant = combine forces (add same direction, subtract opposite).</a:t>
+              <a:t>Same direction: add. Opposite: subtract.</a:t>
             </a:r>
-            <a:endParaRPr lang="en-US" sz="1500" dirty="0"/>
+            <a:endParaRPr lang="en-US" sz="1600" dirty="0"/>
           </a:p>
         </p:txBody>
       </p:sp>
@@ -2390,7 +2461,7 @@
         <p:spPr>
           <a:xfrm>
             <a:off x="731520" y="914400"/>
-            <a:ext cx="2743200" cy="1371600"/>
+            <a:ext cx="1828800" cy="1097280"/>
           </a:xfrm>
           <a:prstGeom prst="rect">
             <a:avLst/>
@@ -2430,7 +2501,7 @@
         </p:nvSpPr>
         <p:spPr>
           <a:xfrm>
-            <a:off x="731520" y="2286000"/>
+            <a:off x="731520" y="2011680"/>
             <a:ext cx="7680960" cy="1097280"/>
           </a:xfrm>
           <a:prstGeom prst="rect">
@@ -2447,7 +2518,7 @@
               <a:buNone/>
             </a:pPr>
             <a:r>
-              <a:rPr lang="en-US" sz="3600" b="1" dirty="0">
+              <a:rPr lang="en-US" sz="3200" b="1" dirty="0">
                 <a:solidFill>
                   <a:srgbClr val="FFFFFF"/>
                 </a:solidFill>
@@ -2455,11 +2526,31 @@
                 <a:ea typeface="Georgia" pitchFamily="34" charset="-122"/>
                 <a:cs typeface="Georgia" pitchFamily="34" charset="-120"/>
               </a:rPr>
-              <a:t>Newton's Laws</a:t>
+              <a:t>Friction &amp; Newton's Laws</a:t>
             </a:r>
-            <a:endParaRPr lang="en-US" sz="3600" dirty="0"/>
-          </a:p>
-        </p:txBody>
+            <a:endParaRPr lang="en-US" sz="3200" dirty="0"/>
+          </a:p>
+        </p:txBody>
+      </p:sp>
+      <p:sp>
+        <p:nvSpPr>
+          <p:cNvPr id="5" name="Shape 3"/>
+          <p:cNvSpPr/>
+          <p:nvPr/>
+        </p:nvSpPr>
+        <p:spPr>
+          <a:xfrm>
+            <a:off x="731520" y="3200400"/>
+            <a:ext cx="1828800" cy="54864"/>
+          </a:xfrm>
+          <a:prstGeom prst="rect">
+            <a:avLst/>
+          </a:prstGeom>
+          <a:solidFill>
+            <a:srgbClr val="C8372D"/>
+          </a:solidFill>
+          <a:ln/>
+        </p:spPr>
       </p:sp>
     </p:spTree>
   </p:cSld>
@@ -2472,6 +2563,13 @@
 <file path=ppt/slides/slide7.xml><?xml version="1.0" encoding="utf-8"?>
 <p:sld xmlns:a="http://schemas.openxmlformats.org/drawingml/2006/main" xmlns:r="http://schemas.openxmlformats.org/officeDocument/2006/relationships" xmlns:p="http://schemas.openxmlformats.org/presentationml/2006/main">
   <p:cSld name="Slide 7">
+    <p:bg>
+      <p:bgPr>
+        <a:solidFill>
+          <a:srgbClr val="FAF8F5"/>
+        </a:solidFill>
+      </p:bgPr>
+    </p:bg>
     <p:spTree>
       <p:nvGrpSpPr>
         <p:cNvPr id="1" name=""/>
@@ -2495,13 +2593,13 @@
         <p:spPr>
           <a:xfrm>
             <a:off x="0" y="0"/>
-            <a:ext cx="9144000" cy="5143500"/>
-          </a:xfrm>
-          <a:prstGeom prst="rect">
-            <a:avLst/>
-          </a:prstGeom>
-          <a:solidFill>
-            <a:srgbClr val="FAF8F5"/>
+            <a:ext cx="9144000" cy="822960"/>
+          </a:xfrm>
+          <a:prstGeom prst="rect">
+            <a:avLst/>
+          </a:prstGeom>
+          <a:solidFill>
+            <a:srgbClr val="FFFFFF"/>
           </a:solidFill>
           <a:ln/>
         </p:spPr>
@@ -2514,8 +2612,8 @@
         </p:nvSpPr>
         <p:spPr>
           <a:xfrm>
-            <a:off x="0" y="0"/>
-            <a:ext cx="9144000" cy="54864"/>
+            <a:off x="0" y="795528"/>
+            <a:ext cx="9144000" cy="27432"/>
           </a:xfrm>
           <a:prstGeom prst="rect">
             <a:avLst/>
@@ -2534,7 +2632,7 @@
         </p:nvSpPr>
         <p:spPr>
           <a:xfrm>
-            <a:off x="640080" y="320040"/>
+            <a:off x="640080" y="91440"/>
             <a:ext cx="7863840" cy="640080"/>
           </a:xfrm>
           <a:prstGeom prst="rect">
@@ -2551,7 +2649,7 @@
               <a:buNone/>
             </a:pPr>
             <a:r>
-              <a:rPr lang="en-US" sz="2600" b="1" dirty="0">
+              <a:rPr lang="en-US" sz="2200" b="1" dirty="0">
                 <a:solidFill>
                   <a:srgbClr val="1B2A4A"/>
                 </a:solidFill>
@@ -2559,118 +2657,576 @@
                 <a:ea typeface="Georgia" pitchFamily="34" charset="-122"/>
                 <a:cs typeface="Georgia" pitchFamily="34" charset="-120"/>
               </a:rPr>
-              <a:t>The Three Laws</a:t>
+              <a:t>All Three Laws</a:t>
             </a:r>
-            <a:endParaRPr lang="en-US" sz="2600" dirty="0"/>
-          </a:p>
-        </p:txBody>
-      </p:sp>
-      <p:sp>
-        <p:nvSpPr>
-          <p:cNvPr id="5" name="Text 3"/>
-          <p:cNvSpPr/>
-          <p:nvPr/>
-        </p:nvSpPr>
-        <p:spPr>
-          <a:xfrm>
-            <a:off x="640080" y="1188720"/>
-            <a:ext cx="7863840" cy="3200400"/>
-          </a:xfrm>
-          <a:prstGeom prst="rect">
-            <a:avLst/>
-          </a:prstGeom>
-          <a:noFill/>
-          <a:ln/>
-        </p:spPr>
-        <p:txBody>
-          <a:bodyPr wrap="square" rtlCol="0" anchor="t"/>
-          <a:lstStyle/>
-          <a:p>
-            <a:pPr marL="342900" indent="-342900">
-              <a:lnSpc>
-                <a:spcPct val="140000"/>
-              </a:lnSpc>
-              <a:buSzPct val="100000"/>
-              <a:buChar char="•"/>
-            </a:pPr>
-            <a:r>
-              <a:rPr lang="en-US" sz="1500" dirty="0">
-                <a:solidFill>
-                  <a:srgbClr val="3D3A36"/>
-                </a:solidFill>
-                <a:latin typeface="Calibri" pitchFamily="34" charset="0"/>
-                <a:ea typeface="Calibri" pitchFamily="34" charset="-122"/>
-                <a:cs typeface="Calibri" pitchFamily="34" charset="-120"/>
-              </a:rPr>
-              <a:t>1st: Objects resist changes in motion (inertia).</a:t>
-            </a:r>
-            <a:endParaRPr lang="en-US" sz="1500" dirty="0"/>
-          </a:p>
-          <a:p>
-            <a:pPr marL="342900" indent="-342900">
-              <a:lnSpc>
-                <a:spcPct val="140000"/>
-              </a:lnSpc>
-              <a:buSzPct val="100000"/>
-              <a:buChar char="•"/>
-            </a:pPr>
-            <a:r>
-              <a:rPr lang="en-US" sz="1500" dirty="0">
-                <a:solidFill>
-                  <a:srgbClr val="3D3A36"/>
-                </a:solidFill>
-                <a:latin typeface="Calibri" pitchFamily="34" charset="0"/>
-                <a:ea typeface="Calibri" pitchFamily="34" charset="-122"/>
-                <a:cs typeface="Calibri" pitchFamily="34" charset="-120"/>
-              </a:rPr>
-              <a:t>2nd: F = m × a (force, mass, acceleration linked).</a:t>
-            </a:r>
-            <a:endParaRPr lang="en-US" sz="1500" dirty="0"/>
-          </a:p>
-          <a:p>
-            <a:pPr marL="342900" indent="-342900">
-              <a:lnSpc>
-                <a:spcPct val="140000"/>
-              </a:lnSpc>
-              <a:buSzPct val="100000"/>
-              <a:buChar char="•"/>
-            </a:pPr>
-            <a:r>
-              <a:rPr lang="en-US" sz="1500" dirty="0">
-                <a:solidFill>
-                  <a:srgbClr val="3D3A36"/>
-                </a:solidFill>
-                <a:latin typeface="Calibri" pitchFamily="34" charset="0"/>
-                <a:ea typeface="Calibri" pitchFamily="34" charset="-122"/>
-                <a:cs typeface="Calibri" pitchFamily="34" charset="-120"/>
-              </a:rPr>
-              <a:t>3rd: Every action has an equal and opposite reaction.</a:t>
-            </a:r>
-            <a:endParaRPr lang="en-US" sz="1500" dirty="0"/>
-          </a:p>
-          <a:p>
-            <a:pPr marL="342900" indent="-342900">
-              <a:lnSpc>
-                <a:spcPct val="140000"/>
-              </a:lnSpc>
-              <a:buSzPct val="100000"/>
-              <a:buChar char="•"/>
-            </a:pPr>
-            <a:r>
-              <a:rPr lang="en-US" sz="1500" dirty="0">
-                <a:solidFill>
-                  <a:srgbClr val="3D3A36"/>
-                </a:solidFill>
-                <a:latin typeface="Calibri" pitchFamily="34" charset="0"/>
-                <a:ea typeface="Calibri" pitchFamily="34" charset="-122"/>
-                <a:cs typeface="Calibri" pitchFamily="34" charset="-120"/>
-              </a:rPr>
-              <a:t>Terminal velocity: when weight = air resistance.</a:t>
-            </a:r>
-            <a:endParaRPr lang="en-US" sz="1500" dirty="0"/>
-          </a:p>
-        </p:txBody>
-      </p:sp>
+            <a:endParaRPr lang="en-US" sz="2200" dirty="0"/>
+          </a:p>
+        </p:txBody>
+      </p:sp>
+      <p:graphicFrame>
+        <p:nvGraphicFramePr>
+          <p:cNvPr id="8" name="Table 0"/>
+          <p:cNvGraphicFramePr>
+            <a:graphicFrameLocks noGrp="1"/>
+          </p:cNvGraphicFramePr>
+          <p:nvPr>
+            <p:extLst>
+              <p:ext uri="{D42A27DB-BD31-4B8C-83A1-F6EECF244321}">
+                <p14:modId xmlns:p14="http://schemas.microsoft.com/office/powerpoint/2010/main" val="1579011935"/>
+              </p:ext>
+            </p:extLst>
+          </p:nvPr>
+        </p:nvGraphicFramePr>
+        <p:xfrm>
+          <a:off x="640080" y="1051560"/>
+          <a:ext cx="7863840" cy="914400"/>
+        </p:xfrm>
+        <a:graphic>
+          <a:graphicData uri="http://schemas.openxmlformats.org/drawingml/2006/table">
+            <a:tbl>
+              <a:tblPr/>
+              <a:tblGrid>
+                <a:gridCol w="3931920"/>
+                <a:gridCol w="3931920"/>
+              </a:tblGrid>
+              <a:tr h="502920">
+                <a:tc>
+                  <a:txBody>
+                    <a:bodyPr/>
+                    <a:lstStyle/>
+                    <a:p>
+                      <a:pPr indent="0" marL="0">
+                        <a:buNone/>
+                      </a:pPr>
+                      <a:r>
+                        <a:rPr lang="en-US" sz="1300" b="1" dirty="0">
+                          <a:solidFill>
+                            <a:srgbClr val="FFFFFF"/>
+                          </a:solidFill>
+                          <a:latin typeface="Calibri" pitchFamily="34" charset="0"/>
+                          <a:ea typeface="Calibri" pitchFamily="34" charset="-122"/>
+                          <a:cs typeface="Calibri" pitchFamily="34" charset="-120"/>
+                        </a:rPr>
+                        <a:t>Law</a:t>
+                      </a:r>
+                      <a:endParaRPr lang="en-US" sz="1300" dirty="0">
+                        <a:latin typeface="Calibri" charset="0"/>
+                        <a:ea typeface="Calibri" charset="0"/>
+                        <a:cs typeface="Calibri" charset="0"/>
+                      </a:endParaRPr>
+                    </a:p>
+                  </a:txBody>
+                  <a:tcPr marL="91440" marR="91440" marT="45720" marB="45720">
+                    <a:lnL w="6350" cap="flat" cmpd="sng" algn="ctr">
+                      <a:solidFill>
+                        <a:srgbClr val="E5E2DC"/>
+                      </a:solidFill>
+                      <a:prstDash val="solid"/>
+                      <a:round/>
+                      <a:headEnd type="none" w="med" len="med"/>
+                      <a:tailEnd type="none" w="med" len="med"/>
+                    </a:lnL>
+                    <a:lnR w="6350" cap="flat" cmpd="sng" algn="ctr">
+                      <a:solidFill>
+                        <a:srgbClr val="E5E2DC"/>
+                      </a:solidFill>
+                      <a:prstDash val="solid"/>
+                      <a:round/>
+                      <a:headEnd type="none" w="med" len="med"/>
+                      <a:tailEnd type="none" w="med" len="med"/>
+                    </a:lnR>
+                    <a:lnT w="6350" cap="flat" cmpd="sng" algn="ctr">
+                      <a:solidFill>
+                        <a:srgbClr val="E5E2DC"/>
+                      </a:solidFill>
+                      <a:prstDash val="solid"/>
+                      <a:round/>
+                      <a:headEnd type="none" w="med" len="med"/>
+                      <a:tailEnd type="none" w="med" len="med"/>
+                    </a:lnT>
+                    <a:lnB w="6350" cap="flat" cmpd="sng" algn="ctr">
+                      <a:solidFill>
+                        <a:srgbClr val="E5E2DC"/>
+                      </a:solidFill>
+                      <a:prstDash val="solid"/>
+                      <a:round/>
+                      <a:headEnd type="none" w="med" len="med"/>
+                      <a:tailEnd type="none" w="med" len="med"/>
+                    </a:lnB>
+                    <a:solidFill>
+                      <a:srgbClr val="C8372D"/>
+                    </a:solidFill>
+                  </a:tcPr>
+                </a:tc>
+                <a:tc>
+                  <a:txBody>
+                    <a:bodyPr/>
+                    <a:lstStyle/>
+                    <a:p>
+                      <a:pPr indent="0" marL="0">
+                        <a:buNone/>
+                      </a:pPr>
+                      <a:r>
+                        <a:rPr lang="en-US" sz="1300" b="1" dirty="0">
+                          <a:solidFill>
+                            <a:srgbClr val="FFFFFF"/>
+                          </a:solidFill>
+                          <a:latin typeface="Calibri" pitchFamily="34" charset="0"/>
+                          <a:ea typeface="Calibri" pitchFamily="34" charset="-122"/>
+                          <a:cs typeface="Calibri" pitchFamily="34" charset="-120"/>
+                        </a:rPr>
+                        <a:t>Summary</a:t>
+                      </a:r>
+                      <a:endParaRPr lang="en-US" sz="1300" dirty="0">
+                        <a:latin typeface="Calibri" charset="0"/>
+                        <a:ea typeface="Calibri" charset="0"/>
+                        <a:cs typeface="Calibri" charset="0"/>
+                      </a:endParaRPr>
+                    </a:p>
+                  </a:txBody>
+                  <a:tcPr marL="91440" marR="91440" marT="45720" marB="45720">
+                    <a:lnL w="6350" cap="flat" cmpd="sng" algn="ctr">
+                      <a:solidFill>
+                        <a:srgbClr val="E5E2DC"/>
+                      </a:solidFill>
+                      <a:prstDash val="solid"/>
+                      <a:round/>
+                      <a:headEnd type="none" w="med" len="med"/>
+                      <a:tailEnd type="none" w="med" len="med"/>
+                    </a:lnL>
+                    <a:lnR w="6350" cap="flat" cmpd="sng" algn="ctr">
+                      <a:solidFill>
+                        <a:srgbClr val="E5E2DC"/>
+                      </a:solidFill>
+                      <a:prstDash val="solid"/>
+                      <a:round/>
+                      <a:headEnd type="none" w="med" len="med"/>
+                      <a:tailEnd type="none" w="med" len="med"/>
+                    </a:lnR>
+                    <a:lnT w="6350" cap="flat" cmpd="sng" algn="ctr">
+                      <a:solidFill>
+                        <a:srgbClr val="E5E2DC"/>
+                      </a:solidFill>
+                      <a:prstDash val="solid"/>
+                      <a:round/>
+                      <a:headEnd type="none" w="med" len="med"/>
+                      <a:tailEnd type="none" w="med" len="med"/>
+                    </a:lnT>
+                    <a:lnB w="6350" cap="flat" cmpd="sng" algn="ctr">
+                      <a:solidFill>
+                        <a:srgbClr val="E5E2DC"/>
+                      </a:solidFill>
+                      <a:prstDash val="solid"/>
+                      <a:round/>
+                      <a:headEnd type="none" w="med" len="med"/>
+                      <a:tailEnd type="none" w="med" len="med"/>
+                    </a:lnB>
+                    <a:solidFill>
+                      <a:srgbClr val="C8372D"/>
+                    </a:solidFill>
+                  </a:tcPr>
+                </a:tc>
+              </a:tr>
+              <a:tr h="502920">
+                <a:tc>
+                  <a:txBody>
+                    <a:bodyPr/>
+                    <a:lstStyle/>
+                    <a:p>
+                      <a:pPr indent="0" marL="0">
+                        <a:buNone/>
+                      </a:pPr>
+                      <a:r>
+                        <a:rPr lang="en-US" sz="1300" dirty="0">
+                          <a:solidFill>
+                            <a:srgbClr val="3D3A36"/>
+                          </a:solidFill>
+                          <a:latin typeface="Calibri" pitchFamily="34" charset="0"/>
+                          <a:ea typeface="Calibri" pitchFamily="34" charset="-122"/>
+                          <a:cs typeface="Calibri" pitchFamily="34" charset="-120"/>
+                        </a:rPr>
+                        <a:t>1st</a:t>
+                      </a:r>
+                      <a:endParaRPr lang="en-US" sz="1300" dirty="0">
+                        <a:latin typeface="Calibri" charset="0"/>
+                        <a:ea typeface="Calibri" charset="0"/>
+                        <a:cs typeface="Calibri" charset="0"/>
+                      </a:endParaRPr>
+                    </a:p>
+                  </a:txBody>
+                  <a:tcPr marL="91440" marR="91440" marT="45720" marB="45720">
+                    <a:lnL w="6350" cap="flat" cmpd="sng" algn="ctr">
+                      <a:solidFill>
+                        <a:srgbClr val="E5E2DC"/>
+                      </a:solidFill>
+                      <a:prstDash val="solid"/>
+                      <a:round/>
+                      <a:headEnd type="none" w="med" len="med"/>
+                      <a:tailEnd type="none" w="med" len="med"/>
+                    </a:lnL>
+                    <a:lnR w="6350" cap="flat" cmpd="sng" algn="ctr">
+                      <a:solidFill>
+                        <a:srgbClr val="E5E2DC"/>
+                      </a:solidFill>
+                      <a:prstDash val="solid"/>
+                      <a:round/>
+                      <a:headEnd type="none" w="med" len="med"/>
+                      <a:tailEnd type="none" w="med" len="med"/>
+                    </a:lnR>
+                    <a:lnT w="6350" cap="flat" cmpd="sng" algn="ctr">
+                      <a:solidFill>
+                        <a:srgbClr val="E5E2DC"/>
+                      </a:solidFill>
+                      <a:prstDash val="solid"/>
+                      <a:round/>
+                      <a:headEnd type="none" w="med" len="med"/>
+                      <a:tailEnd type="none" w="med" len="med"/>
+                    </a:lnT>
+                    <a:lnB w="6350" cap="flat" cmpd="sng" algn="ctr">
+                      <a:solidFill>
+                        <a:srgbClr val="E5E2DC"/>
+                      </a:solidFill>
+                      <a:prstDash val="solid"/>
+                      <a:round/>
+                      <a:headEnd type="none" w="med" len="med"/>
+                      <a:tailEnd type="none" w="med" len="med"/>
+                    </a:lnB>
+                  </a:tcPr>
+                </a:tc>
+                <a:tc>
+                  <a:txBody>
+                    <a:bodyPr/>
+                    <a:lstStyle/>
+                    <a:p>
+                      <a:pPr indent="0" marL="0">
+                        <a:buNone/>
+                      </a:pPr>
+                      <a:r>
+                        <a:rPr lang="en-US" sz="1300" dirty="0">
+                          <a:solidFill>
+                            <a:srgbClr val="3D3A36"/>
+                          </a:solidFill>
+                          <a:latin typeface="Calibri" pitchFamily="34" charset="0"/>
+                          <a:ea typeface="Calibri" pitchFamily="34" charset="-122"/>
+                          <a:cs typeface="Calibri" pitchFamily="34" charset="-120"/>
+                        </a:rPr>
+                        <a:t>No net force → no change (inertia)</a:t>
+                      </a:r>
+                      <a:endParaRPr lang="en-US" sz="1300" dirty="0">
+                        <a:latin typeface="Calibri" charset="0"/>
+                        <a:ea typeface="Calibri" charset="0"/>
+                        <a:cs typeface="Calibri" charset="0"/>
+                      </a:endParaRPr>
+                    </a:p>
+                  </a:txBody>
+                  <a:tcPr marL="91440" marR="91440" marT="45720" marB="45720">
+                    <a:lnL w="6350" cap="flat" cmpd="sng" algn="ctr">
+                      <a:solidFill>
+                        <a:srgbClr val="E5E2DC"/>
+                      </a:solidFill>
+                      <a:prstDash val="solid"/>
+                      <a:round/>
+                      <a:headEnd type="none" w="med" len="med"/>
+                      <a:tailEnd type="none" w="med" len="med"/>
+                    </a:lnL>
+                    <a:lnR w="6350" cap="flat" cmpd="sng" algn="ctr">
+                      <a:solidFill>
+                        <a:srgbClr val="E5E2DC"/>
+                      </a:solidFill>
+                      <a:prstDash val="solid"/>
+                      <a:round/>
+                      <a:headEnd type="none" w="med" len="med"/>
+                      <a:tailEnd type="none" w="med" len="med"/>
+                    </a:lnR>
+                    <a:lnT w="6350" cap="flat" cmpd="sng" algn="ctr">
+                      <a:solidFill>
+                        <a:srgbClr val="E5E2DC"/>
+                      </a:solidFill>
+                      <a:prstDash val="solid"/>
+                      <a:round/>
+                      <a:headEnd type="none" w="med" len="med"/>
+                      <a:tailEnd type="none" w="med" len="med"/>
+                    </a:lnT>
+                    <a:lnB w="6350" cap="flat" cmpd="sng" algn="ctr">
+                      <a:solidFill>
+                        <a:srgbClr val="E5E2DC"/>
+                      </a:solidFill>
+                      <a:prstDash val="solid"/>
+                      <a:round/>
+                      <a:headEnd type="none" w="med" len="med"/>
+                      <a:tailEnd type="none" w="med" len="med"/>
+                    </a:lnB>
+                  </a:tcPr>
+                </a:tc>
+              </a:tr>
+              <a:tr h="502920">
+                <a:tc>
+                  <a:txBody>
+                    <a:bodyPr/>
+                    <a:lstStyle/>
+                    <a:p>
+                      <a:pPr indent="0" marL="0">
+                        <a:buNone/>
+                      </a:pPr>
+                      <a:r>
+                        <a:rPr lang="en-US" sz="1300" dirty="0">
+                          <a:solidFill>
+                            <a:srgbClr val="3D3A36"/>
+                          </a:solidFill>
+                          <a:latin typeface="Calibri" pitchFamily="34" charset="0"/>
+                          <a:ea typeface="Calibri" pitchFamily="34" charset="-122"/>
+                          <a:cs typeface="Calibri" pitchFamily="34" charset="-120"/>
+                        </a:rPr>
+                        <a:t>2nd</a:t>
+                      </a:r>
+                      <a:endParaRPr lang="en-US" sz="1300" dirty="0">
+                        <a:latin typeface="Calibri" charset="0"/>
+                        <a:ea typeface="Calibri" charset="0"/>
+                        <a:cs typeface="Calibri" charset="0"/>
+                      </a:endParaRPr>
+                    </a:p>
+                  </a:txBody>
+                  <a:tcPr marL="91440" marR="91440" marT="45720" marB="45720">
+                    <a:lnL w="6350" cap="flat" cmpd="sng" algn="ctr">
+                      <a:solidFill>
+                        <a:srgbClr val="E5E2DC"/>
+                      </a:solidFill>
+                      <a:prstDash val="solid"/>
+                      <a:round/>
+                      <a:headEnd type="none" w="med" len="med"/>
+                      <a:tailEnd type="none" w="med" len="med"/>
+                    </a:lnL>
+                    <a:lnR w="6350" cap="flat" cmpd="sng" algn="ctr">
+                      <a:solidFill>
+                        <a:srgbClr val="E5E2DC"/>
+                      </a:solidFill>
+                      <a:prstDash val="solid"/>
+                      <a:round/>
+                      <a:headEnd type="none" w="med" len="med"/>
+                      <a:tailEnd type="none" w="med" len="med"/>
+                    </a:lnR>
+                    <a:lnT w="6350" cap="flat" cmpd="sng" algn="ctr">
+                      <a:solidFill>
+                        <a:srgbClr val="E5E2DC"/>
+                      </a:solidFill>
+                      <a:prstDash val="solid"/>
+                      <a:round/>
+                      <a:headEnd type="none" w="med" len="med"/>
+                      <a:tailEnd type="none" w="med" len="med"/>
+                    </a:lnT>
+                    <a:lnB w="6350" cap="flat" cmpd="sng" algn="ctr">
+                      <a:solidFill>
+                        <a:srgbClr val="E5E2DC"/>
+                      </a:solidFill>
+                      <a:prstDash val="solid"/>
+                      <a:round/>
+                      <a:headEnd type="none" w="med" len="med"/>
+                      <a:tailEnd type="none" w="med" len="med"/>
+                    </a:lnB>
+                  </a:tcPr>
+                </a:tc>
+                <a:tc>
+                  <a:txBody>
+                    <a:bodyPr/>
+                    <a:lstStyle/>
+                    <a:p>
+                      <a:pPr indent="0" marL="0">
+                        <a:buNone/>
+                      </a:pPr>
+                      <a:r>
+                        <a:rPr lang="en-US" sz="1300" dirty="0">
+                          <a:solidFill>
+                            <a:srgbClr val="3D3A36"/>
+                          </a:solidFill>
+                          <a:latin typeface="Calibri" pitchFamily="34" charset="0"/>
+                          <a:ea typeface="Calibri" pitchFamily="34" charset="-122"/>
+                          <a:cs typeface="Calibri" pitchFamily="34" charset="-120"/>
+                        </a:rPr>
+                        <a:t>F = ma</a:t>
+                      </a:r>
+                      <a:endParaRPr lang="en-US" sz="1300" dirty="0">
+                        <a:latin typeface="Calibri" charset="0"/>
+                        <a:ea typeface="Calibri" charset="0"/>
+                        <a:cs typeface="Calibri" charset="0"/>
+                      </a:endParaRPr>
+                    </a:p>
+                  </a:txBody>
+                  <a:tcPr marL="91440" marR="91440" marT="45720" marB="45720">
+                    <a:lnL w="6350" cap="flat" cmpd="sng" algn="ctr">
+                      <a:solidFill>
+                        <a:srgbClr val="E5E2DC"/>
+                      </a:solidFill>
+                      <a:prstDash val="solid"/>
+                      <a:round/>
+                      <a:headEnd type="none" w="med" len="med"/>
+                      <a:tailEnd type="none" w="med" len="med"/>
+                    </a:lnL>
+                    <a:lnR w="6350" cap="flat" cmpd="sng" algn="ctr">
+                      <a:solidFill>
+                        <a:srgbClr val="E5E2DC"/>
+                      </a:solidFill>
+                      <a:prstDash val="solid"/>
+                      <a:round/>
+                      <a:headEnd type="none" w="med" len="med"/>
+                      <a:tailEnd type="none" w="med" len="med"/>
+                    </a:lnR>
+                    <a:lnT w="6350" cap="flat" cmpd="sng" algn="ctr">
+                      <a:solidFill>
+                        <a:srgbClr val="E5E2DC"/>
+                      </a:solidFill>
+                      <a:prstDash val="solid"/>
+                      <a:round/>
+                      <a:headEnd type="none" w="med" len="med"/>
+                      <a:tailEnd type="none" w="med" len="med"/>
+                    </a:lnT>
+                    <a:lnB w="6350" cap="flat" cmpd="sng" algn="ctr">
+                      <a:solidFill>
+                        <a:srgbClr val="E5E2DC"/>
+                      </a:solidFill>
+                      <a:prstDash val="solid"/>
+                      <a:round/>
+                      <a:headEnd type="none" w="med" len="med"/>
+                      <a:tailEnd type="none" w="med" len="med"/>
+                    </a:lnB>
+                  </a:tcPr>
+                </a:tc>
+              </a:tr>
+              <a:tr h="502920">
+                <a:tc>
+                  <a:txBody>
+                    <a:bodyPr/>
+                    <a:lstStyle/>
+                    <a:p>
+                      <a:pPr indent="0" marL="0">
+                        <a:buNone/>
+                      </a:pPr>
+                      <a:r>
+                        <a:rPr lang="en-US" sz="1300" dirty="0">
+                          <a:solidFill>
+                            <a:srgbClr val="3D3A36"/>
+                          </a:solidFill>
+                          <a:latin typeface="Calibri" pitchFamily="34" charset="0"/>
+                          <a:ea typeface="Calibri" pitchFamily="34" charset="-122"/>
+                          <a:cs typeface="Calibri" pitchFamily="34" charset="-120"/>
+                        </a:rPr>
+                        <a:t>3rd</a:t>
+                      </a:r>
+                      <a:endParaRPr lang="en-US" sz="1300" dirty="0">
+                        <a:latin typeface="Calibri" charset="0"/>
+                        <a:ea typeface="Calibri" charset="0"/>
+                        <a:cs typeface="Calibri" charset="0"/>
+                      </a:endParaRPr>
+                    </a:p>
+                  </a:txBody>
+                  <a:tcPr marL="91440" marR="91440" marT="45720" marB="45720">
+                    <a:lnL w="6350" cap="flat" cmpd="sng" algn="ctr">
+                      <a:solidFill>
+                        <a:srgbClr val="E5E2DC"/>
+                      </a:solidFill>
+                      <a:prstDash val="solid"/>
+                      <a:round/>
+                      <a:headEnd type="none" w="med" len="med"/>
+                      <a:tailEnd type="none" w="med" len="med"/>
+                    </a:lnL>
+                    <a:lnR w="6350" cap="flat" cmpd="sng" algn="ctr">
+                      <a:solidFill>
+                        <a:srgbClr val="E5E2DC"/>
+                      </a:solidFill>
+                      <a:prstDash val="solid"/>
+                      <a:round/>
+                      <a:headEnd type="none" w="med" len="med"/>
+                      <a:tailEnd type="none" w="med" len="med"/>
+                    </a:lnR>
+                    <a:lnT w="6350" cap="flat" cmpd="sng" algn="ctr">
+                      <a:solidFill>
+                        <a:srgbClr val="E5E2DC"/>
+                      </a:solidFill>
+                      <a:prstDash val="solid"/>
+                      <a:round/>
+                      <a:headEnd type="none" w="med" len="med"/>
+                      <a:tailEnd type="none" w="med" len="med"/>
+                    </a:lnT>
+                    <a:lnB w="6350" cap="flat" cmpd="sng" algn="ctr">
+                      <a:solidFill>
+                        <a:srgbClr val="E5E2DC"/>
+                      </a:solidFill>
+                      <a:prstDash val="solid"/>
+                      <a:round/>
+                      <a:headEnd type="none" w="med" len="med"/>
+                      <a:tailEnd type="none" w="med" len="med"/>
+                    </a:lnB>
+                  </a:tcPr>
+                </a:tc>
+                <a:tc>
+                  <a:txBody>
+                    <a:bodyPr/>
+                    <a:lstStyle/>
+                    <a:p>
+                      <a:pPr indent="0" marL="0">
+                        <a:buNone/>
+                      </a:pPr>
+                      <a:r>
+                        <a:rPr lang="en-US" sz="1300" dirty="0">
+                          <a:solidFill>
+                            <a:srgbClr val="3D3A36"/>
+                          </a:solidFill>
+                          <a:latin typeface="Calibri" pitchFamily="34" charset="0"/>
+                          <a:ea typeface="Calibri" pitchFamily="34" charset="-122"/>
+                          <a:cs typeface="Calibri" pitchFamily="34" charset="-120"/>
+                        </a:rPr>
+                        <a:t>Every action → equal opposite reaction</a:t>
+                      </a:r>
+                      <a:endParaRPr lang="en-US" sz="1300" dirty="0">
+                        <a:latin typeface="Calibri" charset="0"/>
+                        <a:ea typeface="Calibri" charset="0"/>
+                        <a:cs typeface="Calibri" charset="0"/>
+                      </a:endParaRPr>
+                    </a:p>
+                  </a:txBody>
+                  <a:tcPr marL="91440" marR="91440" marT="45720" marB="45720">
+                    <a:lnL w="6350" cap="flat" cmpd="sng" algn="ctr">
+                      <a:solidFill>
+                        <a:srgbClr val="E5E2DC"/>
+                      </a:solidFill>
+                      <a:prstDash val="solid"/>
+                      <a:round/>
+                      <a:headEnd type="none" w="med" len="med"/>
+                      <a:tailEnd type="none" w="med" len="med"/>
+                    </a:lnL>
+                    <a:lnR w="6350" cap="flat" cmpd="sng" algn="ctr">
+                      <a:solidFill>
+                        <a:srgbClr val="E5E2DC"/>
+                      </a:solidFill>
+                      <a:prstDash val="solid"/>
+                      <a:round/>
+                      <a:headEnd type="none" w="med" len="med"/>
+                      <a:tailEnd type="none" w="med" len="med"/>
+                    </a:lnR>
+                    <a:lnT w="6350" cap="flat" cmpd="sng" algn="ctr">
+                      <a:solidFill>
+                        <a:srgbClr val="E5E2DC"/>
+                      </a:solidFill>
+                      <a:prstDash val="solid"/>
+                      <a:round/>
+                      <a:headEnd type="none" w="med" len="med"/>
+                      <a:tailEnd type="none" w="med" len="med"/>
+                    </a:lnT>
+                    <a:lnB w="6350" cap="flat" cmpd="sng" algn="ctr">
+                      <a:solidFill>
+                        <a:srgbClr val="E5E2DC"/>
+                      </a:solidFill>
+                      <a:prstDash val="solid"/>
+                      <a:round/>
+                      <a:headEnd type="none" w="med" len="med"/>
+                      <a:tailEnd type="none" w="med" len="med"/>
+                    </a:lnB>
+                  </a:tcPr>
+                </a:tc>
+              </a:tr>
+            </a:tbl>
+          </a:graphicData>
+        </a:graphic>
+      </p:graphicFrame>
     </p:spTree>
   </p:cSld>
   <p:clrMapOvr>
@@ -2783,7 +3339,7 @@
         </p:nvSpPr>
         <p:spPr>
           <a:xfrm>
-            <a:off x="731520" y="2468880"/>
+            <a:off x="731520" y="2560320"/>
             <a:ext cx="7680960" cy="548640"/>
           </a:xfrm>
           <a:prstGeom prst="rect">
@@ -2800,7 +3356,7 @@
               <a:buNone/>
             </a:pPr>
             <a:r>
-              <a:rPr lang="en-US" sz="1800" dirty="0">
+              <a:rPr lang="en-US" sz="2000" dirty="0">
                 <a:solidFill>
                   <a:srgbClr val="C8372D"/>
                 </a:solidFill>
@@ -2808,48 +3364,9 @@
                 <a:ea typeface="Calibri" pitchFamily="34" charset="-122"/>
                 <a:cs typeface="Calibri" pitchFamily="34" charset="-120"/>
               </a:rPr>
-              <a:t>learnlattice.org/students/exam-revision</a:t>
-            </a:r>
-            <a:endParaRPr lang="en-US" sz="1800" dirty="0"/>
-          </a:p>
-        </p:txBody>
-      </p:sp>
-      <p:sp>
-        <p:nvSpPr>
-          <p:cNvPr id="6" name="Text 4"/>
-          <p:cNvSpPr/>
-          <p:nvPr/>
-        </p:nvSpPr>
-        <p:spPr>
-          <a:xfrm>
-            <a:off x="731520" y="3200400"/>
-            <a:ext cx="7680960" cy="457200"/>
-          </a:xfrm>
-          <a:prstGeom prst="rect">
-            <a:avLst/>
-          </a:prstGeom>
-          <a:noFill/>
-          <a:ln/>
-        </p:spPr>
-        <p:txBody>
-          <a:bodyPr wrap="square" rtlCol="0" anchor="ctr"/>
-          <a:lstStyle/>
-          <a:p>
-            <a:pPr algn="ctr" indent="0" marL="0">
-              <a:buNone/>
-            </a:pPr>
-            <a:r>
-              <a:rPr lang="en-US" sz="1400" dirty="0">
-                <a:solidFill>
-                  <a:srgbClr val="9B9690"/>
-                </a:solidFill>
-                <a:latin typeface="Calibri" pitchFamily="34" charset="0"/>
-                <a:ea typeface="Calibri" pitchFamily="34" charset="-122"/>
-                <a:cs typeface="Calibri" pitchFamily="34" charset="-120"/>
-              </a:rPr>
               <a:t>mrzocchi.com</a:t>
             </a:r>
-            <a:endParaRPr lang="en-US" sz="1400" dirty="0"/>
+            <a:endParaRPr lang="en-US" sz="2000" dirty="0"/>
           </a:p>
         </p:txBody>
       </p:sp>
